--- a/CostVision-Option-3-Business-Case.pptx
+++ b/CostVision-Option-3-Business-Case.pptx
@@ -3165,7 +3165,7 @@
         <p:spPr>
           <a:xfrm>
             <a:off x="384048" y="1042415"/>
-            <a:ext cx="5687568" cy="1755648"/>
+            <a:ext cx="5687568" cy="1792224"/>
           </a:xfrm>
           <a:prstGeom prst="roundRect">
             <a:avLst>
@@ -3210,7 +3210,7 @@
         </p:nvSpPr>
         <p:spPr>
           <a:xfrm>
-            <a:off x="603504" y="1170432"/>
+            <a:off x="603504" y="1152144"/>
             <a:ext cx="3749039" cy="256032"/>
           </a:xfrm>
           <a:prstGeom prst="rect">
@@ -3249,8 +3249,8 @@
         </p:nvSpPr>
         <p:spPr>
           <a:xfrm>
-            <a:off x="603504" y="1389888"/>
-            <a:ext cx="5285232" cy="1335024"/>
+            <a:off x="603504" y="1371600"/>
+            <a:ext cx="5285232" cy="1389888"/>
           </a:xfrm>
           <a:prstGeom prst="rect">
             <a:avLst/>
@@ -3281,7 +3281,7 @@
                 </a:solidFill>
                 <a:latin typeface="Calibri"/>
               </a:rPr>
-              <a:t>Most of what a cost engineer needs is written on the 2D drawing, not held in the 3D model. Tolerances, surface finish, heat treatment and material notes are read by eye and typed in by hand.</a:t>
+              <a:t>Costing a circuit board means listing every component on it and pricing each one. A board with a few hundred parts is a few hundred separate decisions.</a:t>
             </a:r>
           </a:p>
           <a:p>
@@ -3302,7 +3302,7 @@
                 </a:solidFill>
                 <a:latin typeface="Calibri"/>
               </a:rPr>
-              <a:t>Many parts never reach us as a 3D model. We are sent a drawing. For electronics we are sent a photograph of the board.</a:t>
+              <a:t>It needs someone who knows what electronics cost — a small capacitor, a six-layer board, placing a fine-pitch chip. Few people have that, so boards wait for them.</a:t>
             </a:r>
           </a:p>
           <a:p>
@@ -3323,7 +3323,28 @@
                 </a:solidFill>
                 <a:latin typeface="Calibri"/>
               </a:rPr>
-              <a:t>The costing method and the rate data do not change. This is only about reading the input.</a:t>
+              <a:t>On mechanical parts, most of what we need is written on the 2D drawing, not held in the 3D model, and is read by eye and typed in by hand.</a:t>
+            </a:r>
+          </a:p>
+          <a:p>
+            <a:pPr algn="l" marL="155448" indent="-155448">
+              <a:lnSpc>
+                <a:spcPct val="100000"/>
+              </a:lnSpc>
+              <a:spcBef>
+                <a:spcPts val="400"/>
+              </a:spcBef>
+              <a:buFont typeface="Arial"/>
+              <a:buChar char="•"/>
+            </a:pPr>
+            <a:r>
+              <a:rPr sz="950">
+                <a:solidFill>
+                  <a:srgbClr val="333333"/>
+                </a:solidFill>
+                <a:latin typeface="Calibri"/>
+              </a:rPr>
+              <a:t>The costing method and the rate data do not change. Only the reading changes.</a:t>
             </a:r>
           </a:p>
         </p:txBody>
@@ -3574,7 +3595,7 @@
                 </a:solidFill>
                 <a:latin typeface="Calibri"/>
               </a:rPr>
-              <a:t>Parts we cannot cost today, plus the hours spent reading drawings by hand.</a:t>
+              <a:t>The boards we turn away today, and the specialist hours spent on them.</a:t>
             </a:r>
           </a:p>
         </p:txBody>
@@ -3791,7 +3812,7 @@
                 </a:solidFill>
                 <a:latin typeface="Calibri"/>
               </a:rPr>
-              <a:t>A cost engineer reads the drawing, notes the tolerances, finish and heat treatment, and types them into CAPPe alongside the figures taken off the model.</a:t>
+              <a:t>For a board, someone identifies every component from a photo or a sample — package, value, rating, and the exact part number for each chip — then finds a price for every line at the volume we are asking about.</a:t>
             </a:r>
           </a:p>
           <a:p>
@@ -3812,7 +3833,7 @@
                 </a:solidFill>
                 <a:latin typeface="Calibri"/>
               </a:rPr>
-              <a:t>For a circuit board, someone lists every component by hand from a photograph or a sample board, then prices each line before any costing can begin.</a:t>
+              <a:t>The bare board is estimated separately for size, layers, finish and test, and then the assembly on top: how many placements, how many are fine-pitch or BGA, one side or two.</a:t>
             </a:r>
           </a:p>
           <a:p>
@@ -3833,7 +3854,28 @@
                 </a:solidFill>
                 <a:latin typeface="Calibri"/>
               </a:rPr>
-              <a:t>Because it takes so long, we cost the parts we are asked about rather than the ones worth asking about, and a cost is rarely revisited when the design moves on.</a:t>
+              <a:t>All of it needs an electronics cost specialist. When they are busy the board waits. If they move on, we cannot cost boards at all.</a:t>
+            </a:r>
+          </a:p>
+          <a:p>
+            <a:pPr algn="l" marL="155448" indent="-155448">
+              <a:lnSpc>
+                <a:spcPct val="100000"/>
+              </a:lnSpc>
+              <a:spcBef>
+                <a:spcPts val="400"/>
+              </a:spcBef>
+              <a:buFont typeface="Arial"/>
+              <a:buChar char="•"/>
+            </a:pPr>
+            <a:r>
+              <a:rPr sz="950">
+                <a:solidFill>
+                  <a:srgbClr val="333333"/>
+                </a:solidFill>
+                <a:latin typeface="Calibri"/>
+              </a:rPr>
+              <a:t>For a machined part, the drawing is read by eye and the tolerances, finish and heat treatment typed into CAPPe by hand.</a:t>
             </a:r>
           </a:p>
         </p:txBody>
@@ -3963,7 +4005,7 @@
                 </a:solidFill>
                 <a:latin typeface="Calibri"/>
               </a:rPr>
-              <a:t>Conduct a 3-stage Proof of Value (PoV) project, run the same way as the CAD to Cost PoV.</a:t>
+              <a:t>Conduct a 3-stage Proof of Value (PoV), run the same way as the CAD to Cost PoV, and validate outputs vs existing cost estimates.</a:t>
             </a:r>
           </a:p>
           <a:p>
@@ -3984,7 +4026,7 @@
                 </a:solidFill>
                 <a:latin typeface="Calibri"/>
               </a:rPr>
-              <a:t>Use an assistant to read the 2D drawing and the board photo and write down what it found — tolerances, finish and heat treatment for a part, the component list for a board.</a:t>
+              <a:t>For a board: upload a photo, say how many you are making and where it is built. The tool lists the components, prices each line, works out the bare board and the assembly, and gives the full cost.</a:t>
             </a:r>
           </a:p>
           <a:p>
@@ -4005,7 +4047,7 @@
                 </a:solidFill>
                 <a:latin typeface="Calibri"/>
               </a:rPr>
-              <a:t>Everything it reads is checked against the measured geometry or a price catalogue before it is used. It reads the input. It does not set any price.</a:t>
+              <a:t>For a machined part: the drawing is read alongside the model, for the tolerances, finish and heat treatment the model cannot carry.</a:t>
             </a:r>
           </a:p>
           <a:p>
@@ -4026,7 +4068,7 @@
                 </a:solidFill>
                 <a:latin typeface="Calibri"/>
               </a:rPr>
-              <a:t>Generate cost estimates for a sample of parts and boards, and validate outputs vs existing cost estimates.</a:t>
+              <a:t>Everything it reads is checked against a price catalogue or the measured geometry before it is used. It does not set any price.</a:t>
             </a:r>
           </a:p>
         </p:txBody>
@@ -4158,7 +4200,7 @@
                 </a:solidFill>
                 <a:latin typeface="Calibri"/>
               </a:rPr>
-              <a:t>Wider Coverage: </a:t>
+              <a:t>No Specialist Needed: </a:t>
             </a:r>
             <a:r>
               <a:rPr sz="950">
@@ -4167,7 +4209,7 @@
                 </a:solidFill>
                 <a:latin typeface="Calibri"/>
               </a:rPr>
-              <a:t>Cost the parts and boards we cannot cost today, because a drawing or a photograph is all we have.</a:t>
+              <a:t>A cost engineer can cost a board without being an electronics pricing specialist. The specialist checks the answer instead of building it.</a:t>
             </a:r>
           </a:p>
           <a:p>
@@ -4182,22 +4224,22 @@
               <a:buChar char="•"/>
             </a:pPr>
             <a:r>
-              <a:rPr sz="1000" b="1">
+              <a:rPr sz="950" b="1">
                 <a:solidFill>
                   <a:srgbClr val="1F2A44"/>
                 </a:solidFill>
                 <a:latin typeface="Calibri"/>
               </a:rPr>
-              <a:t>Improved Quality: </a:t>
-            </a:r>
-            <a:r>
-              <a:rPr sz="1000">
+              <a:t>Wider Coverage: </a:t>
+            </a:r>
+            <a:r>
+              <a:rPr sz="950">
                 <a:solidFill>
                   <a:srgbClr val="333333"/>
                 </a:solidFill>
                 <a:latin typeface="Calibri"/>
               </a:rPr>
-              <a:t>Fewer mistakes copying figures across, and the same drawing read the same way every time.</a:t>
+              <a:t>We can cost the boards and parts we turn away today, and re-cost them when the design changes.</a:t>
             </a:r>
           </a:p>
         </p:txBody>

--- a/CostVision-Option-3-Business-Case.pptx
+++ b/CostVision-Option-3-Business-Case.pptx
@@ -3281,7 +3281,7 @@
                 </a:solidFill>
                 <a:latin typeface="Calibri"/>
               </a:rPr>
-              <a:t>Costing a circuit board means listing every component on it and pricing each one. A board with a few hundred parts is a few hundred separate decisions.</a:t>
+              <a:t>Costing a circuit board means listing every component on it and pricing each one. A medium-complexity board takes two to three weeks.</a:t>
             </a:r>
           </a:p>
           <a:p>
@@ -3445,8 +3445,8 @@
         </p:nvSpPr>
         <p:spPr>
           <a:xfrm>
-            <a:off x="6291072" y="1042415"/>
-            <a:ext cx="2724912" cy="1243584"/>
+            <a:off x="6291072" y="1024128"/>
+            <a:ext cx="2724912" cy="1261872"/>
           </a:xfrm>
           <a:prstGeom prst="roundRect">
             <a:avLst>
@@ -3493,8 +3493,8 @@
         </p:nvSpPr>
         <p:spPr>
           <a:xfrm>
-            <a:off x="6473952" y="1152144"/>
-            <a:ext cx="2377440" cy="1024128"/>
+            <a:off x="6473952" y="1133856"/>
+            <a:ext cx="2377440" cy="1005840"/>
           </a:xfrm>
           <a:prstGeom prst="rect">
             <a:avLst/>
@@ -3595,7 +3595,7 @@
                 </a:solidFill>
                 <a:latin typeface="Calibri"/>
               </a:rPr>
-              <a:t>The boards we turn away today, and the specialist hours spent on them.</a:t>
+              <a:t>The boards we turn away, and the weeks a specialist spends on each one.</a:t>
             </a:r>
           </a:p>
         </p:txBody>
@@ -3608,8 +3608,8 @@
         </p:nvSpPr>
         <p:spPr>
           <a:xfrm>
-            <a:off x="6291072" y="2395728"/>
-            <a:ext cx="2724912" cy="384048"/>
+            <a:off x="6291072" y="2340864"/>
+            <a:ext cx="2724912" cy="493776"/>
           </a:xfrm>
           <a:prstGeom prst="roundRect">
             <a:avLst>
@@ -3656,8 +3656,8 @@
         </p:nvSpPr>
         <p:spPr>
           <a:xfrm>
-            <a:off x="6473952" y="2487168"/>
-            <a:ext cx="2377440" cy="219456"/>
+            <a:off x="6473952" y="2404872"/>
+            <a:ext cx="2377440" cy="384048"/>
           </a:xfrm>
           <a:prstGeom prst="rect">
             <a:avLst/>
@@ -3683,6 +3683,25 @@
                 <a:latin typeface="Calibri"/>
               </a:rPr>
               <a:t>Time (hrs/week)</a:t>
+            </a:r>
+          </a:p>
+          <a:p>
+            <a:pPr algn="l">
+              <a:lnSpc>
+                <a:spcPct val="100000"/>
+              </a:lnSpc>
+              <a:spcBef>
+                <a:spcPts val="200"/>
+              </a:spcBef>
+            </a:pPr>
+            <a:r>
+              <a:rPr sz="1000" b="1">
+                <a:solidFill>
+                  <a:srgbClr val="1F2A44"/>
+                </a:solidFill>
+                <a:latin typeface="Calibri"/>
+              </a:rPr>
+              <a:t>2–3 weeks per board</a:t>
             </a:r>
           </a:p>
         </p:txBody>
@@ -3854,7 +3873,7 @@
                 </a:solidFill>
                 <a:latin typeface="Calibri"/>
               </a:rPr>
-              <a:t>All of it needs an electronics cost specialist. When they are busy the board waits. If they move on, we cannot cost boards at all.</a:t>
+              <a:t>All of it needs an electronics cost specialist, and two to three weeks. A design change means starting again.</a:t>
             </a:r>
           </a:p>
           <a:p>

--- a/CostVision-Option-3-Business-Case.pptx
+++ b/CostVision-Option-3-Business-Case.pptx
@@ -6,6 +6,7 @@
   </p:sldMasterIdLst>
   <p:sldIdLst>
     <p:sldId id="256" r:id="rId7"/>
+    <p:sldId id="257" r:id="rId8"/>
   </p:sldIdLst>
   <p:sldSz cx="12191695" cy="6858000" type="screen4x3"/>
   <p:notesSz cx="6858000" cy="9144000"/>
@@ -3714,8 +3715,8 @@
         </p:nvSpPr>
         <p:spPr>
           <a:xfrm>
-            <a:off x="274320" y="2852928"/>
-            <a:ext cx="8558784" cy="1609344"/>
+            <a:off x="274320" y="2871216"/>
+            <a:ext cx="8558784" cy="1298448"/>
           </a:xfrm>
           <a:prstGeom prst="roundRect">
             <a:avLst>
@@ -3760,7 +3761,7 @@
         </p:nvSpPr>
         <p:spPr>
           <a:xfrm>
-            <a:off x="512064" y="2944368"/>
+            <a:off x="512064" y="2962656"/>
             <a:ext cx="2743200" cy="256032"/>
           </a:xfrm>
           <a:prstGeom prst="rect">
@@ -3799,8 +3800,8 @@
         </p:nvSpPr>
         <p:spPr>
           <a:xfrm>
-            <a:off x="512064" y="3163824"/>
-            <a:ext cx="8138160" cy="1225296"/>
+            <a:off x="512064" y="3182112"/>
+            <a:ext cx="8138160" cy="914400"/>
           </a:xfrm>
           <a:prstGeom prst="rect">
             <a:avLst/>
@@ -3831,7 +3832,7 @@
                 </a:solidFill>
                 <a:latin typeface="Calibri"/>
               </a:rPr>
-              <a:t>For a board, someone identifies every component from a photo or a sample — package, value, rating, and the exact part number for each chip — then finds a price for every line at the volume we are asking about.</a:t>
+              <a:t>Costing one board means listing every component, pricing each line, then estimating the bare board and the assembly. Two to three weeks for a medium board.</a:t>
             </a:r>
           </a:p>
           <a:p>
@@ -3852,7 +3853,7 @@
                 </a:solidFill>
                 <a:latin typeface="Calibri"/>
               </a:rPr>
-              <a:t>The bare board is estimated separately for size, layers, finish and test, and then the assembly on top: how many placements, how many are fine-pitch or BGA, one side or two.</a:t>
+              <a:t>It needs an electronics cost specialist, and a design change means starting again.</a:t>
             </a:r>
           </a:p>
           <a:p>
@@ -3873,28 +3874,7 @@
                 </a:solidFill>
                 <a:latin typeface="Calibri"/>
               </a:rPr>
-              <a:t>All of it needs an electronics cost specialist, and two to three weeks. A design change means starting again.</a:t>
-            </a:r>
-          </a:p>
-          <a:p>
-            <a:pPr algn="l" marL="155448" indent="-155448">
-              <a:lnSpc>
-                <a:spcPct val="100000"/>
-              </a:lnSpc>
-              <a:spcBef>
-                <a:spcPts val="400"/>
-              </a:spcBef>
-              <a:buFont typeface="Arial"/>
-              <a:buChar char="•"/>
-            </a:pPr>
-            <a:r>
-              <a:rPr sz="950">
-                <a:solidFill>
-                  <a:srgbClr val="333333"/>
-                </a:solidFill>
-                <a:latin typeface="Calibri"/>
-              </a:rPr>
-              <a:t>For a machined part, the drawing is read by eye and the tolerances, finish and heat treatment typed into CAPPe by hand.</a:t>
+              <a:t>For a machined part, the drawing is read by eye and typed into CAPPe by hand.</a:t>
             </a:r>
           </a:p>
         </p:txBody>
@@ -3907,8 +3887,8 @@
         </p:nvSpPr>
         <p:spPr>
           <a:xfrm>
-            <a:off x="365760" y="4498848"/>
-            <a:ext cx="8412480" cy="2139696"/>
+            <a:off x="365760" y="4261104"/>
+            <a:ext cx="8412480" cy="1773936"/>
           </a:xfrm>
           <a:prstGeom prst="roundRect">
             <a:avLst>
@@ -3953,7 +3933,7 @@
         </p:nvSpPr>
         <p:spPr>
           <a:xfrm>
-            <a:off x="603504" y="4608576"/>
+            <a:off x="603504" y="4352544"/>
             <a:ext cx="3657600" cy="256032"/>
           </a:xfrm>
           <a:prstGeom prst="rect">
@@ -3992,8 +3972,8 @@
         </p:nvSpPr>
         <p:spPr>
           <a:xfrm>
-            <a:off x="603504" y="4864608"/>
-            <a:ext cx="4663440" cy="1700784"/>
+            <a:off x="603504" y="4608576"/>
+            <a:ext cx="4663440" cy="1316736"/>
           </a:xfrm>
           <a:prstGeom prst="rect">
             <a:avLst/>
@@ -4024,7 +4004,7 @@
                 </a:solidFill>
                 <a:latin typeface="Calibri"/>
               </a:rPr>
-              <a:t>Conduct a 3-stage Proof of Value (PoV), run the same way as the CAD to Cost PoV, and validate outputs vs existing cost estimates.</a:t>
+              <a:t>Conduct a 3-stage Proof of Value (PoV), run the same way as the CAD to Cost PoV.</a:t>
             </a:r>
           </a:p>
           <a:p>
@@ -4045,7 +4025,7 @@
                 </a:solidFill>
                 <a:latin typeface="Calibri"/>
               </a:rPr>
-              <a:t>For a board: upload a photo, say how many you are making and where it is built. The tool lists the components, prices each line, works out the bare board and the assembly, and gives the full cost.</a:t>
+              <a:t>Upload a photo of the board, or a drawing alongside the 3D model. The tool reads it and returns a full cost.</a:t>
             </a:r>
           </a:p>
           <a:p>
@@ -4066,7 +4046,7 @@
                 </a:solidFill>
                 <a:latin typeface="Calibri"/>
               </a:rPr>
-              <a:t>For a machined part: the drawing is read alongside the model, for the tolerances, finish and heat treatment the model cannot carry.</a:t>
+              <a:t>Everything it reads is checked before it is used. It does not set any price.</a:t>
             </a:r>
           </a:p>
           <a:p>
@@ -4087,7 +4067,7 @@
                 </a:solidFill>
                 <a:latin typeface="Calibri"/>
               </a:rPr>
-              <a:t>Everything it reads is checked against a price catalogue or the measured geometry before it is used. It does not set any price.</a:t>
+              <a:t>The detail is on the next page.</a:t>
             </a:r>
           </a:p>
         </p:txBody>
@@ -4100,8 +4080,8 @@
         </p:nvSpPr>
         <p:spPr>
           <a:xfrm>
-            <a:off x="5413248" y="4663440"/>
-            <a:ext cx="3236976" cy="1828800"/>
+            <a:off x="5413248" y="4407408"/>
+            <a:ext cx="3236976" cy="1463040"/>
           </a:xfrm>
           <a:prstGeom prst="roundRect">
             <a:avLst>
@@ -4148,7 +4128,7 @@
         </p:nvSpPr>
         <p:spPr>
           <a:xfrm>
-            <a:off x="5614416" y="4773168"/>
+            <a:off x="5614416" y="4498848"/>
             <a:ext cx="2834640" cy="256032"/>
           </a:xfrm>
           <a:prstGeom prst="rect">
@@ -4187,8 +4167,8 @@
         </p:nvSpPr>
         <p:spPr>
           <a:xfrm>
-            <a:off x="5614416" y="5084064"/>
-            <a:ext cx="2834640" cy="1316736"/>
+            <a:off x="5614416" y="4773168"/>
+            <a:ext cx="2834640" cy="1024128"/>
           </a:xfrm>
           <a:prstGeom prst="rect">
             <a:avLst/>
@@ -4228,7 +4208,7 @@
                 </a:solidFill>
                 <a:latin typeface="Calibri"/>
               </a:rPr>
-              <a:t>A cost engineer can cost a board without being an electronics pricing specialist. The specialist checks the answer instead of building it.</a:t>
+              <a:t>A cost engineer can cost a board without being an electronics specialist.</a:t>
             </a:r>
           </a:p>
           <a:p>
@@ -4258,7 +4238,7 @@
                 </a:solidFill>
                 <a:latin typeface="Calibri"/>
               </a:rPr>
-              <a:t>We can cost the boards and parts we turn away today, and re-cost them when the design changes.</a:t>
+              <a:t>We can cost the boards and parts we turn away today.</a:t>
             </a:r>
           </a:p>
         </p:txBody>
@@ -4356,8 +4336,8 @@
         </p:nvSpPr>
         <p:spPr>
           <a:xfrm>
-            <a:off x="9326880" y="3511296"/>
-            <a:ext cx="2414016" cy="3035808"/>
+            <a:off x="9326880" y="3474720"/>
+            <a:ext cx="2414016" cy="2980944"/>
           </a:xfrm>
           <a:prstGeom prst="rect">
             <a:avLst/>
@@ -4433,7 +4413,7 @@
                 <a:spcPct val="100000"/>
               </a:lnSpc>
               <a:spcBef>
-                <a:spcPts val="1100"/>
+                <a:spcPts val="1300"/>
               </a:spcBef>
             </a:pPr>
             <a:r>
@@ -4471,7 +4451,7 @@
                 <a:spcPct val="100000"/>
               </a:lnSpc>
               <a:spcBef>
-                <a:spcPts val="1100"/>
+                <a:spcPts val="1300"/>
               </a:spcBef>
             </a:pPr>
             <a:r>
@@ -4520,6 +4500,655 @@
                 <a:latin typeface="Calibri"/>
               </a:rPr>
               <a:t>It needs an approved route to the model. Option 2 runs with that route switched off. This one cannot.</a:t>
+            </a:r>
+          </a:p>
+        </p:txBody>
+      </p:sp>
+    </p:spTree>
+  </p:cSld>
+  <p:clrMapOvr>
+    <a:masterClrMapping/>
+  </p:clrMapOvr>
+</p:sld>
+</file>
+
+<file path=ppt/slides/slide2.xml><?xml version="1.0" encoding="utf-8"?>
+<p:sld xmlns:a="http://schemas.openxmlformats.org/drawingml/2006/main" xmlns:p="http://schemas.openxmlformats.org/presentationml/2006/main" xmlns:r="http://schemas.openxmlformats.org/officeDocument/2006/relationships">
+  <p:cSld>
+    <p:spTree>
+      <p:nvGrpSpPr>
+        <p:cNvPr id="1" name=""/>
+        <p:cNvGrpSpPr/>
+        <p:nvPr/>
+      </p:nvGrpSpPr>
+      <p:grpSpPr/>
+      <p:sp>
+        <p:nvSpPr>
+          <p:cNvPr id="2" name="TextBox 1"/>
+          <p:cNvSpPr txBox="1"/>
+          <p:nvPr/>
+        </p:nvSpPr>
+        <p:spPr>
+          <a:xfrm>
+            <a:off x="566928" y="475488"/>
+            <a:ext cx="10058400" cy="384048"/>
+          </a:xfrm>
+          <a:prstGeom prst="rect">
+            <a:avLst/>
+          </a:prstGeom>
+          <a:noFill/>
+        </p:spPr>
+        <p:txBody>
+          <a:bodyPr wrap="square" lIns="0" rIns="0" tIns="0" bIns="0">
+            <a:spAutoFit/>
+          </a:bodyPr>
+          <a:lstStyle/>
+          <a:p>
+            <a:r>
+              <a:rPr sz="1700" spc="240">
+                <a:solidFill>
+                  <a:srgbClr val="1F2A44"/>
+                </a:solidFill>
+                <a:latin typeface="Calibri"/>
+              </a:rPr>
+              <a:t>Drawings and PCB Photos – The Proposal in Detail</a:t>
+            </a:r>
+          </a:p>
+        </p:txBody>
+      </p:sp>
+      <p:sp>
+        <p:nvSpPr>
+          <p:cNvPr id="3" name="TextBox 2"/>
+          <p:cNvSpPr txBox="1"/>
+          <p:nvPr/>
+        </p:nvSpPr>
+        <p:spPr>
+          <a:xfrm>
+            <a:off x="768096" y="969264"/>
+            <a:ext cx="3657600" cy="274320"/>
+          </a:xfrm>
+          <a:prstGeom prst="rect">
+            <a:avLst/>
+          </a:prstGeom>
+          <a:noFill/>
+        </p:spPr>
+        <p:txBody>
+          <a:bodyPr wrap="square" lIns="0" rIns="0" tIns="0" bIns="0">
+            <a:spAutoFit/>
+          </a:bodyPr>
+          <a:lstStyle/>
+          <a:p>
+            <a:r>
+              <a:rPr sz="1350" b="1">
+                <a:solidFill>
+                  <a:srgbClr val="1F2A44"/>
+                </a:solidFill>
+                <a:latin typeface="Calibri"/>
+              </a:rPr>
+              <a:t>Proposal</a:t>
+            </a:r>
+          </a:p>
+        </p:txBody>
+      </p:sp>
+      <p:sp>
+        <p:nvSpPr>
+          <p:cNvPr id="4" name="Rounded Rectangle 3"/>
+          <p:cNvSpPr/>
+          <p:nvPr/>
+        </p:nvSpPr>
+        <p:spPr>
+          <a:xfrm>
+            <a:off x="566928" y="1225296"/>
+            <a:ext cx="5504688" cy="4992624"/>
+          </a:xfrm>
+          <a:prstGeom prst="roundRect">
+            <a:avLst>
+              <a:gd name="adj" fmla="val 3500"/>
+            </a:avLst>
+          </a:prstGeom>
+          <a:noFill/>
+          <a:ln w="12700">
+            <a:solidFill>
+              <a:srgbClr val="C9CFD7"/>
+            </a:solidFill>
+          </a:ln>
+          <a:effectLst/>
+        </p:spPr>
+        <p:style>
+          <a:lnRef idx="1">
+            <a:schemeClr val="accent1"/>
+          </a:lnRef>
+          <a:fillRef idx="3">
+            <a:schemeClr val="accent1"/>
+          </a:fillRef>
+          <a:effectRef idx="2">
+            <a:schemeClr val="accent1"/>
+          </a:effectRef>
+          <a:fontRef idx="minor">
+            <a:schemeClr val="lt1"/>
+          </a:fontRef>
+        </p:style>
+        <p:txBody>
+          <a:bodyPr rtlCol="0" anchor="ctr" wrap="square"/>
+          <a:lstStyle/>
+          <a:p>
+            <a:pPr algn="ctr"/>
+          </a:p>
+        </p:txBody>
+      </p:sp>
+      <p:sp>
+        <p:nvSpPr>
+          <p:cNvPr id="5" name="TextBox 4"/>
+          <p:cNvSpPr txBox="1"/>
+          <p:nvPr/>
+        </p:nvSpPr>
+        <p:spPr>
+          <a:xfrm>
+            <a:off x="841248" y="1353312"/>
+            <a:ext cx="4974336" cy="4718304"/>
+          </a:xfrm>
+          <a:prstGeom prst="rect">
+            <a:avLst/>
+          </a:prstGeom>
+          <a:noFill/>
+        </p:spPr>
+        <p:txBody>
+          <a:bodyPr wrap="square" lIns="0" rIns="0" tIns="0" bIns="0">
+            <a:spAutoFit/>
+          </a:bodyPr>
+          <a:lstStyle/>
+          <a:p/>
+          <a:p>
+            <a:pPr algn="l">
+              <a:spcBef>
+                <a:spcPts val="0"/>
+              </a:spcBef>
+            </a:pPr>
+            <a:r>
+              <a:rPr sz="1150" b="1">
+                <a:solidFill>
+                  <a:srgbClr val="1F2A44"/>
+                </a:solidFill>
+                <a:latin typeface="Calibri"/>
+              </a:rPr>
+              <a:t>How a board is costed today</a:t>
+            </a:r>
+          </a:p>
+          <a:p>
+            <a:pPr algn="l" marL="155448" indent="-155448">
+              <a:lnSpc>
+                <a:spcPct val="100000"/>
+              </a:lnSpc>
+              <a:spcBef>
+                <a:spcPts val="600"/>
+              </a:spcBef>
+              <a:buFont typeface="Arial"/>
+              <a:buChar char="•"/>
+            </a:pPr>
+            <a:r>
+              <a:rPr sz="1050">
+                <a:solidFill>
+                  <a:srgbClr val="333333"/>
+                </a:solidFill>
+                <a:latin typeface="Calibri"/>
+              </a:rPr>
+              <a:t>Someone identifies every component from a photo or a sample — package, value, rating, and the exact part number for each chip.</a:t>
+            </a:r>
+          </a:p>
+          <a:p>
+            <a:pPr algn="l" marL="155448" indent="-155448">
+              <a:lnSpc>
+                <a:spcPct val="100000"/>
+              </a:lnSpc>
+              <a:spcBef>
+                <a:spcPts val="600"/>
+              </a:spcBef>
+              <a:buFont typeface="Arial"/>
+              <a:buChar char="•"/>
+            </a:pPr>
+            <a:r>
+              <a:rPr sz="1050">
+                <a:solidFill>
+                  <a:srgbClr val="333333"/>
+                </a:solidFill>
+                <a:latin typeface="Calibri"/>
+              </a:rPr>
+              <a:t>They find a price for every line, at the volume we are asking about.</a:t>
+            </a:r>
+          </a:p>
+          <a:p>
+            <a:pPr algn="l" marL="155448" indent="-155448">
+              <a:lnSpc>
+                <a:spcPct val="100000"/>
+              </a:lnSpc>
+              <a:spcBef>
+                <a:spcPts val="600"/>
+              </a:spcBef>
+              <a:buFont typeface="Arial"/>
+              <a:buChar char="•"/>
+            </a:pPr>
+            <a:r>
+              <a:rPr sz="1050">
+                <a:solidFill>
+                  <a:srgbClr val="333333"/>
+                </a:solidFill>
+                <a:latin typeface="Calibri"/>
+              </a:rPr>
+              <a:t>The bare board is estimated separately for size, layers, finish and test.</a:t>
+            </a:r>
+          </a:p>
+          <a:p>
+            <a:pPr algn="l" marL="155448" indent="-155448">
+              <a:lnSpc>
+                <a:spcPct val="100000"/>
+              </a:lnSpc>
+              <a:spcBef>
+                <a:spcPts val="600"/>
+              </a:spcBef>
+              <a:buFont typeface="Arial"/>
+              <a:buChar char="•"/>
+            </a:pPr>
+            <a:r>
+              <a:rPr sz="1050">
+                <a:solidFill>
+                  <a:srgbClr val="333333"/>
+                </a:solidFill>
+                <a:latin typeface="Calibri"/>
+              </a:rPr>
+              <a:t>Then the assembly: how many placements, how many are fine-pitch or BGA, one side or two.</a:t>
+            </a:r>
+          </a:p>
+          <a:p>
+            <a:pPr algn="l" marL="155448" indent="-155448">
+              <a:lnSpc>
+                <a:spcPct val="100000"/>
+              </a:lnSpc>
+              <a:spcBef>
+                <a:spcPts val="600"/>
+              </a:spcBef>
+              <a:buFont typeface="Arial"/>
+              <a:buChar char="•"/>
+            </a:pPr>
+            <a:r>
+              <a:rPr sz="1050">
+                <a:solidFill>
+                  <a:srgbClr val="333333"/>
+                </a:solidFill>
+                <a:latin typeface="Calibri"/>
+              </a:rPr>
+              <a:t>Two to three weeks for a medium board, and only a specialist can do it.</a:t>
+            </a:r>
+          </a:p>
+          <a:p>
+            <a:pPr algn="l">
+              <a:spcBef>
+                <a:spcPts val="1400"/>
+              </a:spcBef>
+            </a:pPr>
+            <a:r>
+              <a:rPr sz="1150" b="1">
+                <a:solidFill>
+                  <a:srgbClr val="1F2A44"/>
+                </a:solidFill>
+                <a:latin typeface="Calibri"/>
+              </a:rPr>
+              <a:t>What we propose</a:t>
+            </a:r>
+          </a:p>
+          <a:p>
+            <a:pPr algn="l" marL="155448" indent="-155448">
+              <a:lnSpc>
+                <a:spcPct val="100000"/>
+              </a:lnSpc>
+              <a:spcBef>
+                <a:spcPts val="700"/>
+              </a:spcBef>
+              <a:buFont typeface="Arial"/>
+              <a:buChar char="•"/>
+            </a:pPr>
+            <a:r>
+              <a:rPr sz="1050">
+                <a:solidFill>
+                  <a:srgbClr val="333333"/>
+                </a:solidFill>
+                <a:latin typeface="Calibri"/>
+              </a:rPr>
+              <a:t>Extend the Proof of Value to cover 2D drawings and photographs of boards.</a:t>
+            </a:r>
+          </a:p>
+          <a:p>
+            <a:pPr algn="l" marL="155448" indent="-155448">
+              <a:lnSpc>
+                <a:spcPct val="100000"/>
+              </a:lnSpc>
+              <a:spcBef>
+                <a:spcPts val="600"/>
+              </a:spcBef>
+              <a:buFont typeface="Arial"/>
+              <a:buChar char="•"/>
+            </a:pPr>
+            <a:r>
+              <a:rPr sz="1050">
+                <a:solidFill>
+                  <a:srgbClr val="333333"/>
+                </a:solidFill>
+                <a:latin typeface="Calibri"/>
+              </a:rPr>
+              <a:t>Upload a photo of the board. Say how many you are making and where it is built.</a:t>
+            </a:r>
+          </a:p>
+          <a:p>
+            <a:pPr algn="l" marL="155448" indent="-155448">
+              <a:lnSpc>
+                <a:spcPct val="100000"/>
+              </a:lnSpc>
+              <a:spcBef>
+                <a:spcPts val="600"/>
+              </a:spcBef>
+              <a:buFont typeface="Arial"/>
+              <a:buChar char="•"/>
+            </a:pPr>
+            <a:r>
+              <a:rPr sz="1050">
+                <a:solidFill>
+                  <a:srgbClr val="333333"/>
+                </a:solidFill>
+                <a:latin typeface="Calibri"/>
+              </a:rPr>
+              <a:t>The tool lists the components it can see, prices each line from the catalogue, works out the bare board and the assembly, and returns the full cost breakdown.</a:t>
+            </a:r>
+          </a:p>
+          <a:p>
+            <a:pPr algn="l" marL="155448" indent="-155448">
+              <a:lnSpc>
+                <a:spcPct val="100000"/>
+              </a:lnSpc>
+              <a:spcBef>
+                <a:spcPts val="600"/>
+              </a:spcBef>
+              <a:buFont typeface="Arial"/>
+              <a:buChar char="•"/>
+            </a:pPr>
+            <a:r>
+              <a:rPr sz="1050">
+                <a:solidFill>
+                  <a:srgbClr val="333333"/>
+                </a:solidFill>
+                <a:latin typeface="Calibri"/>
+              </a:rPr>
+              <a:t>For a machined part, the drawing is read alongside the 3D model, for the tolerances, finish and heat treatment the model cannot carry.</a:t>
+            </a:r>
+          </a:p>
+          <a:p>
+            <a:pPr algn="l" marL="155448" indent="-155448">
+              <a:lnSpc>
+                <a:spcPct val="100000"/>
+              </a:lnSpc>
+              <a:spcBef>
+                <a:spcPts val="600"/>
+              </a:spcBef>
+              <a:buFont typeface="Arial"/>
+              <a:buChar char="•"/>
+            </a:pPr>
+            <a:r>
+              <a:rPr sz="1050">
+                <a:solidFill>
+                  <a:srgbClr val="333333"/>
+                </a:solidFill>
+                <a:latin typeface="Calibri"/>
+              </a:rPr>
+              <a:t>Every figure it reads is checked against the price catalogue or the measured geometry before it is used.</a:t>
+            </a:r>
+          </a:p>
+          <a:p>
+            <a:pPr algn="l" marL="155448" indent="-155448">
+              <a:lnSpc>
+                <a:spcPct val="100000"/>
+              </a:lnSpc>
+              <a:spcBef>
+                <a:spcPts val="600"/>
+              </a:spcBef>
+              <a:buFont typeface="Arial"/>
+              <a:buChar char="•"/>
+            </a:pPr>
+            <a:r>
+              <a:rPr sz="1050">
+                <a:solidFill>
+                  <a:srgbClr val="333333"/>
+                </a:solidFill>
+                <a:latin typeface="Calibri"/>
+              </a:rPr>
+              <a:t>Compare the output against cost estimates we already have.</a:t>
+            </a:r>
+          </a:p>
+        </p:txBody>
+      </p:sp>
+      <p:sp>
+        <p:nvSpPr>
+          <p:cNvPr id="6" name="TextBox 5"/>
+          <p:cNvSpPr txBox="1"/>
+          <p:nvPr/>
+        </p:nvSpPr>
+        <p:spPr>
+          <a:xfrm>
+            <a:off x="6583680" y="1170432"/>
+            <a:ext cx="3657600" cy="274320"/>
+          </a:xfrm>
+          <a:prstGeom prst="rect">
+            <a:avLst/>
+          </a:prstGeom>
+          <a:noFill/>
+        </p:spPr>
+        <p:txBody>
+          <a:bodyPr wrap="square" lIns="0" rIns="0" tIns="0" bIns="0">
+            <a:spAutoFit/>
+          </a:bodyPr>
+          <a:lstStyle/>
+          <a:p>
+            <a:r>
+              <a:rPr sz="1350" b="1">
+                <a:solidFill>
+                  <a:srgbClr val="1F2A44"/>
+                </a:solidFill>
+                <a:latin typeface="Calibri"/>
+              </a:rPr>
+              <a:t>Expected Benefits:</a:t>
+            </a:r>
+          </a:p>
+        </p:txBody>
+      </p:sp>
+      <p:sp>
+        <p:nvSpPr>
+          <p:cNvPr id="7" name="Rounded Rectangle 6"/>
+          <p:cNvSpPr/>
+          <p:nvPr/>
+        </p:nvSpPr>
+        <p:spPr>
+          <a:xfrm>
+            <a:off x="6382512" y="1426464"/>
+            <a:ext cx="5266944" cy="4791456"/>
+          </a:xfrm>
+          <a:prstGeom prst="roundRect">
+            <a:avLst>
+              <a:gd name="adj" fmla="val 3500"/>
+            </a:avLst>
+          </a:prstGeom>
+          <a:noFill/>
+          <a:ln w="12700">
+            <a:solidFill>
+              <a:srgbClr val="C9CFD7"/>
+            </a:solidFill>
+          </a:ln>
+          <a:effectLst/>
+        </p:spPr>
+        <p:style>
+          <a:lnRef idx="1">
+            <a:schemeClr val="accent1"/>
+          </a:lnRef>
+          <a:fillRef idx="3">
+            <a:schemeClr val="accent1"/>
+          </a:fillRef>
+          <a:effectRef idx="2">
+            <a:schemeClr val="accent1"/>
+          </a:effectRef>
+          <a:fontRef idx="minor">
+            <a:schemeClr val="lt1"/>
+          </a:fontRef>
+        </p:style>
+        <p:txBody>
+          <a:bodyPr rtlCol="0" anchor="ctr" wrap="square"/>
+          <a:lstStyle/>
+          <a:p>
+            <a:pPr algn="ctr"/>
+          </a:p>
+        </p:txBody>
+      </p:sp>
+      <p:sp>
+        <p:nvSpPr>
+          <p:cNvPr id="8" name="TextBox 7"/>
+          <p:cNvSpPr txBox="1"/>
+          <p:nvPr/>
+        </p:nvSpPr>
+        <p:spPr>
+          <a:xfrm>
+            <a:off x="6656832" y="1627632"/>
+            <a:ext cx="4736592" cy="4480560"/>
+          </a:xfrm>
+          <a:prstGeom prst="rect">
+            <a:avLst/>
+          </a:prstGeom>
+          <a:noFill/>
+        </p:spPr>
+        <p:txBody>
+          <a:bodyPr wrap="square" lIns="0" rIns="0" tIns="0" bIns="0">
+            <a:spAutoFit/>
+          </a:bodyPr>
+          <a:lstStyle/>
+          <a:p/>
+          <a:p>
+            <a:pPr algn="l" marL="155448" indent="-155448">
+              <a:lnSpc>
+                <a:spcPct val="100000"/>
+              </a:lnSpc>
+              <a:spcBef>
+                <a:spcPts val="0"/>
+              </a:spcBef>
+              <a:buFont typeface="Arial"/>
+              <a:buChar char="•"/>
+            </a:pPr>
+            <a:r>
+              <a:rPr sz="1100">
+                <a:solidFill>
+                  <a:srgbClr val="333333"/>
+                </a:solidFill>
+                <a:latin typeface="Calibri"/>
+              </a:rPr>
+              <a:t>A cost engineer can cost a board without being an electronics pricing specialist. The specialist checks the answer instead of building it.</a:t>
+            </a:r>
+          </a:p>
+          <a:p>
+            <a:pPr algn="l" marL="155448" indent="-155448">
+              <a:lnSpc>
+                <a:spcPct val="100000"/>
+              </a:lnSpc>
+              <a:spcBef>
+                <a:spcPts val="2200"/>
+              </a:spcBef>
+              <a:buFont typeface="Arial"/>
+              <a:buChar char="•"/>
+            </a:pPr>
+            <a:r>
+              <a:rPr sz="1100">
+                <a:solidFill>
+                  <a:srgbClr val="333333"/>
+                </a:solidFill>
+                <a:latin typeface="Calibri"/>
+              </a:rPr>
+              <a:t>We can cost the boards and the parts we turn away today, because a photograph or a drawing is all we have.</a:t>
+            </a:r>
+          </a:p>
+          <a:p>
+            <a:pPr algn="l" marL="155448" indent="-155448">
+              <a:lnSpc>
+                <a:spcPct val="100000"/>
+              </a:lnSpc>
+              <a:spcBef>
+                <a:spcPts val="2200"/>
+              </a:spcBef>
+              <a:buFont typeface="Arial"/>
+              <a:buChar char="•"/>
+            </a:pPr>
+            <a:r>
+              <a:rPr sz="1100">
+                <a:solidFill>
+                  <a:srgbClr val="333333"/>
+                </a:solidFill>
+                <a:latin typeface="Calibri"/>
+              </a:rPr>
+              <a:t>A cost can be redone when the design changes, instead of going out of date and staying that way.</a:t>
+            </a:r>
+          </a:p>
+          <a:p>
+            <a:pPr algn="l" marL="155448" indent="-155448">
+              <a:lnSpc>
+                <a:spcPct val="100000"/>
+              </a:lnSpc>
+              <a:spcBef>
+                <a:spcPts val="2200"/>
+              </a:spcBef>
+              <a:buFont typeface="Arial"/>
+              <a:buChar char="•"/>
+            </a:pPr>
+            <a:r>
+              <a:rPr sz="1100">
+                <a:solidFill>
+                  <a:srgbClr val="333333"/>
+                </a:solidFill>
+                <a:latin typeface="Calibri"/>
+              </a:rPr>
+              <a:t>The costing method and the rate data do not change, so the answer is consistent with what we produce today and with everything downstream.</a:t>
+            </a:r>
+          </a:p>
+          <a:p>
+            <a:pPr algn="l" marL="155448" indent="-155448">
+              <a:lnSpc>
+                <a:spcPct val="100000"/>
+              </a:lnSpc>
+              <a:spcBef>
+                <a:spcPts val="2200"/>
+              </a:spcBef>
+              <a:buFont typeface="Arial"/>
+              <a:buChar char="•"/>
+            </a:pPr>
+            <a:r>
+              <a:rPr sz="1100">
+                <a:solidFill>
+                  <a:srgbClr val="333333"/>
+                </a:solidFill>
+                <a:latin typeface="Calibri"/>
+              </a:rPr>
+              <a:t>Boards can be costed early, while the design can still be changed cheaply.</a:t>
+            </a:r>
+          </a:p>
+          <a:p>
+            <a:pPr algn="l" marL="155448" indent="-155448">
+              <a:lnSpc>
+                <a:spcPct val="100000"/>
+              </a:lnSpc>
+              <a:spcBef>
+                <a:spcPts val="2200"/>
+              </a:spcBef>
+              <a:buFont typeface="Arial"/>
+              <a:buChar char="•"/>
+            </a:pPr>
+            <a:r>
+              <a:rPr sz="1100">
+                <a:solidFill>
+                  <a:srgbClr val="333333"/>
+                </a:solidFill>
+                <a:latin typeface="Calibri"/>
+              </a:rPr>
+              <a:t>Cost engineers stay in charge. Every figure is theirs to check, correct and sign off, and the tool never sets a price itself.</a:t>
             </a:r>
           </a:p>
         </p:txBody>

--- a/CostVision-Option-3-Business-Case.pptx
+++ b/CostVision-Option-3-Business-Case.pptx
@@ -3148,7 +3148,7 @@
             <a:r>
               <a:rPr sz="1700" spc="240">
                 <a:solidFill>
-                  <a:srgbClr val="1F2A44"/>
+                  <a:srgbClr val="16325C"/>
                 </a:solidFill>
                 <a:latin typeface="Calibri"/>
               </a:rPr>
@@ -3233,7 +3233,7 @@
             <a:r>
               <a:rPr sz="1300" b="1">
                 <a:solidFill>
-                  <a:srgbClr val="1F2A44"/>
+                  <a:srgbClr val="16325C"/>
                 </a:solidFill>
                 <a:latin typeface="Calibri"/>
               </a:rPr>
@@ -3376,7 +3376,7 @@
             <a:r>
               <a:rPr sz="1200" b="1">
                 <a:solidFill>
-                  <a:srgbClr val="1F2A44"/>
+                  <a:srgbClr val="16325C"/>
                 </a:solidFill>
                 <a:latin typeface="Calibri"/>
               </a:rPr>
@@ -3402,7 +3402,7 @@
           <a:noFill/>
           <a:ln w="15875">
             <a:solidFill>
-              <a:srgbClr val="1F2A44"/>
+              <a:srgbClr val="16325C"/>
             </a:solidFill>
           </a:ln>
           <a:effectLst/>
@@ -3429,7 +3429,7 @@
             <a:r>
               <a:rPr sz="1050" b="1">
                 <a:solidFill>
-                  <a:srgbClr val="1F2A44"/>
+                  <a:srgbClr val="16325C"/>
                 </a:solidFill>
                 <a:latin typeface="Calibri"/>
               </a:rPr>
@@ -3516,7 +3516,7 @@
             <a:r>
               <a:rPr sz="1250" b="1">
                 <a:solidFill>
-                  <a:srgbClr val="1F2A44"/>
+                  <a:srgbClr val="16325C"/>
                 </a:solidFill>
                 <a:latin typeface="Calibri"/>
               </a:rPr>
@@ -3535,7 +3535,7 @@
             <a:r>
               <a:rPr sz="1100" b="1">
                 <a:solidFill>
-                  <a:srgbClr val="1F2A44"/>
+                  <a:srgbClr val="16325C"/>
                 </a:solidFill>
                 <a:latin typeface="Calibri"/>
               </a:rPr>
@@ -3554,7 +3554,7 @@
             <a:r>
               <a:rPr sz="1100" b="1">
                 <a:solidFill>
-                  <a:srgbClr val="1F2A44"/>
+                  <a:srgbClr val="16325C"/>
                 </a:solidFill>
                 <a:latin typeface="Calibri"/>
               </a:rPr>
@@ -3573,7 +3573,7 @@
             <a:r>
               <a:rPr sz="1000" b="1">
                 <a:solidFill>
-                  <a:srgbClr val="1F2A44"/>
+                  <a:srgbClr val="16325C"/>
                 </a:solidFill>
                 <a:latin typeface="Calibri"/>
               </a:rPr>
@@ -3679,7 +3679,7 @@
             <a:r>
               <a:rPr sz="1200" b="1">
                 <a:solidFill>
-                  <a:srgbClr val="1F2A44"/>
+                  <a:srgbClr val="16325C"/>
                 </a:solidFill>
                 <a:latin typeface="Calibri"/>
               </a:rPr>
@@ -3698,7 +3698,7 @@
             <a:r>
               <a:rPr sz="1000" b="1">
                 <a:solidFill>
-                  <a:srgbClr val="1F2A44"/>
+                  <a:srgbClr val="16325C"/>
                 </a:solidFill>
                 <a:latin typeface="Calibri"/>
               </a:rPr>
@@ -3783,7 +3783,7 @@
             <a:r>
               <a:rPr sz="1300" b="1">
                 <a:solidFill>
-                  <a:srgbClr val="1F2A44"/>
+                  <a:srgbClr val="16325C"/>
                 </a:solidFill>
                 <a:latin typeface="Calibri"/>
               </a:rPr>
@@ -3955,7 +3955,7 @@
             <a:r>
               <a:rPr sz="1300" b="1">
                 <a:solidFill>
-                  <a:srgbClr val="1F2A44"/>
+                  <a:srgbClr val="16325C"/>
                 </a:solidFill>
                 <a:latin typeface="Calibri"/>
               </a:rPr>
@@ -4150,7 +4150,7 @@
             <a:r>
               <a:rPr sz="1250" b="1">
                 <a:solidFill>
-                  <a:srgbClr val="1F2A44"/>
+                  <a:srgbClr val="16325C"/>
                 </a:solidFill>
                 <a:latin typeface="Calibri"/>
               </a:rPr>
@@ -4195,7 +4195,7 @@
             <a:r>
               <a:rPr sz="950" b="1">
                 <a:solidFill>
-                  <a:srgbClr val="1F2A44"/>
+                  <a:srgbClr val="16325C"/>
                 </a:solidFill>
                 <a:latin typeface="Calibri"/>
               </a:rPr>
@@ -4225,7 +4225,7 @@
             <a:r>
               <a:rPr sz="950" b="1">
                 <a:solidFill>
-                  <a:srgbClr val="1F2A44"/>
+                  <a:srgbClr val="16325C"/>
                 </a:solidFill>
                 <a:latin typeface="Calibri"/>
               </a:rPr>
@@ -4319,7 +4319,7 @@
             <a:r>
               <a:rPr sz="1250" b="1">
                 <a:solidFill>
-                  <a:srgbClr val="1F2A44"/>
+                  <a:srgbClr val="16325C"/>
                 </a:solidFill>
                 <a:latin typeface="Calibri"/>
               </a:rPr>
@@ -4362,7 +4362,7 @@
             <a:r>
               <a:rPr sz="1100" b="1">
                 <a:solidFill>
-                  <a:srgbClr val="1F2A44"/>
+                  <a:srgbClr val="16325C"/>
                 </a:solidFill>
                 <a:latin typeface="Calibri"/>
               </a:rPr>
@@ -4381,7 +4381,7 @@
             <a:r>
               <a:rPr sz="1100" b="1">
                 <a:solidFill>
-                  <a:srgbClr val="1F2A44"/>
+                  <a:srgbClr val="16325C"/>
                 </a:solidFill>
                 <a:latin typeface="Calibri"/>
               </a:rPr>
@@ -4419,7 +4419,7 @@
             <a:r>
               <a:rPr sz="1100" b="1">
                 <a:solidFill>
-                  <a:srgbClr val="1F2A44"/>
+                  <a:srgbClr val="16325C"/>
                 </a:solidFill>
                 <a:latin typeface="Calibri"/>
               </a:rPr>
@@ -4457,7 +4457,7 @@
             <a:r>
               <a:rPr sz="1100" b="1">
                 <a:solidFill>
-                  <a:srgbClr val="1F2A44"/>
+                  <a:srgbClr val="16325C"/>
                 </a:solidFill>
                 <a:latin typeface="Calibri"/>
               </a:rPr>
@@ -4476,7 +4476,7 @@
             <a:r>
               <a:rPr sz="1100" b="1">
                 <a:solidFill>
-                  <a:srgbClr val="1F2A44"/>
+                  <a:srgbClr val="16325C"/>
                 </a:solidFill>
                 <a:latin typeface="Calibri"/>
               </a:rPr>
@@ -4547,7 +4547,7 @@
             <a:r>
               <a:rPr sz="1700" spc="240">
                 <a:solidFill>
-                  <a:srgbClr val="1F2A44"/>
+                  <a:srgbClr val="16325C"/>
                 </a:solidFill>
                 <a:latin typeface="Calibri"/>
               </a:rPr>
@@ -4581,7 +4581,7 @@
             <a:r>
               <a:rPr sz="1350" b="1">
                 <a:solidFill>
-                  <a:srgbClr val="1F2A44"/>
+                  <a:srgbClr val="16325C"/>
                 </a:solidFill>
                 <a:latin typeface="Calibri"/>
               </a:rPr>
@@ -4667,7 +4667,7 @@
             <a:r>
               <a:rPr sz="1150" b="1">
                 <a:solidFill>
-                  <a:srgbClr val="1F2A44"/>
+                  <a:srgbClr val="16325C"/>
                 </a:solidFill>
                 <a:latin typeface="Calibri"/>
               </a:rPr>
@@ -4788,7 +4788,7 @@
             <a:r>
               <a:rPr sz="1150" b="1">
                 <a:solidFill>
-                  <a:srgbClr val="1F2A44"/>
+                  <a:srgbClr val="16325C"/>
                 </a:solidFill>
                 <a:latin typeface="Calibri"/>
               </a:rPr>
@@ -4948,7 +4948,7 @@
             <a:r>
               <a:rPr sz="1350" b="1">
                 <a:solidFill>
-                  <a:srgbClr val="1F2A44"/>
+                  <a:srgbClr val="16325C"/>
                 </a:solidFill>
                 <a:latin typeface="Calibri"/>
               </a:rPr>

--- a/CostVision-Option-3-Business-Case.pptx
+++ b/CostVision-Option-3-Business-Case.pptx
@@ -4,11 +4,14 @@
   <p:sldMasterIdLst>
     <p:sldMasterId id="2147483648" r:id="rId1"/>
   </p:sldMasterIdLst>
+  <p:notesMasterIdLst>
+    <p:notesMasterId r:id="rId8"/>
+  </p:notesMasterIdLst>
   <p:sldIdLst>
     <p:sldId id="256" r:id="rId7"/>
-    <p:sldId id="257" r:id="rId8"/>
+    <p:sldId id="257" r:id="rId9"/>
   </p:sldIdLst>
-  <p:sldSz cx="12191695" cy="6858000" type="screen4x3"/>
+  <p:sldSz cx="12191695" cy="6858000"/>
   <p:notesSz cx="6858000" cy="9144000"/>
   <p:defaultTextStyle>
     <a:defPPr>
@@ -106,6 +109,550 @@
     </a:lvl9pPr>
   </p:defaultTextStyle>
 </p:presentation>
+</file>
+
+<file path=ppt/notesMasters/notesMaster1.xml><?xml version="1.0" encoding="utf-8"?>
+<p:notesMaster xmlns:a="http://schemas.openxmlformats.org/drawingml/2006/main" xmlns:p="http://schemas.openxmlformats.org/presentationml/2006/main" xmlns:r="http://schemas.openxmlformats.org/officeDocument/2006/relationships">
+  <p:cSld>
+    <p:bg>
+      <p:bgRef idx="1001">
+        <a:schemeClr val="bg1"/>
+      </p:bgRef>
+    </p:bg>
+    <p:spTree>
+      <p:nvGrpSpPr>
+        <p:cNvPr id="1" name=""/>
+        <p:cNvGrpSpPr/>
+        <p:nvPr/>
+      </p:nvGrpSpPr>
+      <p:grpSpPr>
+        <a:xfrm>
+          <a:off x="0" y="0"/>
+          <a:ext cx="0" cy="0"/>
+          <a:chOff x="0" y="0"/>
+          <a:chExt cx="0" cy="0"/>
+        </a:xfrm>
+      </p:grpSpPr>
+      <p:sp>
+        <p:nvSpPr>
+          <p:cNvPr id="2" name="Header Placeholder 1"/>
+          <p:cNvSpPr>
+            <a:spLocks noGrp="1"/>
+          </p:cNvSpPr>
+          <p:nvPr>
+            <p:ph type="hdr" sz="quarter"/>
+          </p:nvPr>
+        </p:nvSpPr>
+        <p:spPr>
+          <a:xfrm>
+            <a:off x="0" y="0"/>
+            <a:ext cx="2971800" cy="457200"/>
+          </a:xfrm>
+          <a:prstGeom prst="rect">
+            <a:avLst/>
+          </a:prstGeom>
+        </p:spPr>
+        <p:txBody>
+          <a:bodyPr vert="horz" lIns="91440" tIns="45720" rIns="91440" bIns="45720" rtlCol="0"/>
+          <a:lstStyle>
+            <a:lvl1pPr algn="l">
+              <a:defRPr sz="1200"/>
+            </a:lvl1pPr>
+          </a:lstStyle>
+          <a:p>
+            <a:endParaRPr lang="en-US"/>
+          </a:p>
+        </p:txBody>
+      </p:sp>
+      <p:sp>
+        <p:nvSpPr>
+          <p:cNvPr id="3" name="Date Placeholder 2"/>
+          <p:cNvSpPr>
+            <a:spLocks noGrp="1"/>
+          </p:cNvSpPr>
+          <p:nvPr>
+            <p:ph type="dt" idx="1"/>
+          </p:nvPr>
+        </p:nvSpPr>
+        <p:spPr>
+          <a:xfrm>
+            <a:off x="3884613" y="0"/>
+            <a:ext cx="2971800" cy="457200"/>
+          </a:xfrm>
+          <a:prstGeom prst="rect">
+            <a:avLst/>
+          </a:prstGeom>
+        </p:spPr>
+        <p:txBody>
+          <a:bodyPr vert="horz" lIns="91440" tIns="45720" rIns="91440" bIns="45720" rtlCol="0"/>
+          <a:lstStyle>
+            <a:lvl1pPr algn="r">
+              <a:defRPr sz="1200"/>
+            </a:lvl1pPr>
+          </a:lstStyle>
+          <a:p>
+            <a:fld id="{0F89C1C7-3DCD-1040-A9CF-14679D8B5DDD}" type="datetimeFigureOut">
+              <a:rPr lang="en-US" smtClean="0"/>
+              <a:t>10/17/16</a:t>
+            </a:fld>
+            <a:endParaRPr lang="en-US"/>
+          </a:p>
+        </p:txBody>
+      </p:sp>
+      <p:sp>
+        <p:nvSpPr>
+          <p:cNvPr id="4" name="Slide Image Placeholder 3"/>
+          <p:cNvSpPr>
+            <a:spLocks noGrp="1" noRot="1" noChangeAspect="1"/>
+          </p:cNvSpPr>
+          <p:nvPr>
+            <p:ph type="sldImg" idx="2"/>
+          </p:nvPr>
+        </p:nvSpPr>
+        <p:spPr>
+          <a:xfrm>
+            <a:off x="1143000" y="685800"/>
+            <a:ext cx="4572000" cy="3429000"/>
+          </a:xfrm>
+          <a:prstGeom prst="rect">
+            <a:avLst/>
+          </a:prstGeom>
+          <a:noFill/>
+          <a:ln w="12700">
+            <a:solidFill>
+              <a:prstClr val="black"/>
+            </a:solidFill>
+          </a:ln>
+        </p:spPr>
+        <p:txBody>
+          <a:bodyPr vert="horz" lIns="91440" tIns="45720" rIns="91440" bIns="45720" rtlCol="0" anchor="ctr"/>
+          <a:lstStyle/>
+          <a:p>
+            <a:endParaRPr lang="en-US"/>
+          </a:p>
+        </p:txBody>
+      </p:sp>
+      <p:sp>
+        <p:nvSpPr>
+          <p:cNvPr id="5" name="Notes Placeholder 4"/>
+          <p:cNvSpPr>
+            <a:spLocks noGrp="1"/>
+          </p:cNvSpPr>
+          <p:nvPr>
+            <p:ph type="body" sz="quarter" idx="3"/>
+          </p:nvPr>
+        </p:nvSpPr>
+        <p:spPr>
+          <a:xfrm>
+            <a:off x="685800" y="4343400"/>
+            <a:ext cx="5486400" cy="4114800"/>
+          </a:xfrm>
+          <a:prstGeom prst="rect">
+            <a:avLst/>
+          </a:prstGeom>
+        </p:spPr>
+        <p:txBody>
+          <a:bodyPr vert="horz" lIns="91440" tIns="45720" rIns="91440" bIns="45720" rtlCol="0"/>
+          <a:lstStyle/>
+          <a:p>
+            <a:pPr lvl="0"/>
+            <a:r>
+              <a:rPr lang="en-US" smtClean="0"/>
+              <a:t>Click to edit Master text styles</a:t>
+            </a:r>
+          </a:p>
+          <a:p>
+            <a:pPr lvl="1"/>
+            <a:r>
+              <a:rPr lang="en-US" smtClean="0"/>
+              <a:t>Second level</a:t>
+            </a:r>
+          </a:p>
+          <a:p>
+            <a:pPr lvl="2"/>
+            <a:r>
+              <a:rPr lang="en-US" smtClean="0"/>
+              <a:t>Third level</a:t>
+            </a:r>
+          </a:p>
+          <a:p>
+            <a:pPr lvl="3"/>
+            <a:r>
+              <a:rPr lang="en-US" smtClean="0"/>
+              <a:t>Fourth level</a:t>
+            </a:r>
+          </a:p>
+          <a:p>
+            <a:pPr lvl="4"/>
+            <a:r>
+              <a:rPr lang="en-US" smtClean="0"/>
+              <a:t>Fifth level</a:t>
+            </a:r>
+            <a:endParaRPr lang="en-US"/>
+          </a:p>
+        </p:txBody>
+      </p:sp>
+      <p:sp>
+        <p:nvSpPr>
+          <p:cNvPr id="6" name="Footer Placeholder 5"/>
+          <p:cNvSpPr>
+            <a:spLocks noGrp="1"/>
+          </p:cNvSpPr>
+          <p:nvPr>
+            <p:ph type="ftr" sz="quarter" idx="4"/>
+          </p:nvPr>
+        </p:nvSpPr>
+        <p:spPr>
+          <a:xfrm>
+            <a:off x="0" y="8685213"/>
+            <a:ext cx="2971800" cy="457200"/>
+          </a:xfrm>
+          <a:prstGeom prst="rect">
+            <a:avLst/>
+          </a:prstGeom>
+        </p:spPr>
+        <p:txBody>
+          <a:bodyPr vert="horz" lIns="91440" tIns="45720" rIns="91440" bIns="45720" rtlCol="0" anchor="b"/>
+          <a:lstStyle>
+            <a:lvl1pPr algn="l">
+              <a:defRPr sz="1200"/>
+            </a:lvl1pPr>
+          </a:lstStyle>
+          <a:p>
+            <a:endParaRPr lang="en-US"/>
+          </a:p>
+        </p:txBody>
+      </p:sp>
+      <p:sp>
+        <p:nvSpPr>
+          <p:cNvPr id="7" name="Slide Number Placeholder 6"/>
+          <p:cNvSpPr>
+            <a:spLocks noGrp="1"/>
+          </p:cNvSpPr>
+          <p:nvPr>
+            <p:ph type="sldNum" sz="quarter" idx="5"/>
+          </p:nvPr>
+        </p:nvSpPr>
+        <p:spPr>
+          <a:xfrm>
+            <a:off x="3884613" y="8685213"/>
+            <a:ext cx="2971800" cy="457200"/>
+          </a:xfrm>
+          <a:prstGeom prst="rect">
+            <a:avLst/>
+          </a:prstGeom>
+        </p:spPr>
+        <p:txBody>
+          <a:bodyPr vert="horz" lIns="91440" tIns="45720" rIns="91440" bIns="45720" rtlCol="0" anchor="b"/>
+          <a:lstStyle>
+            <a:lvl1pPr algn="r">
+              <a:defRPr sz="1200"/>
+            </a:lvl1pPr>
+          </a:lstStyle>
+          <a:p>
+            <a:fld id="{BB5E49A5-4136-284D-997B-48E1D791AD67}" type="slidenum">
+              <a:rPr lang="en-US" smtClean="0"/>
+              <a:t>‹#›</a:t>
+            </a:fld>
+            <a:endParaRPr lang="en-US"/>
+          </a:p>
+        </p:txBody>
+      </p:sp>
+    </p:spTree>
+    <p:extLst>
+      <p:ext uri="{BB962C8B-B14F-4D97-AF65-F5344CB8AC3E}">
+        <p14:creationId xmlns:p14="http://schemas.microsoft.com/office/powerpoint/2010/main" val="2623252185"/>
+      </p:ext>
+    </p:extLst>
+  </p:cSld>
+  <p:clrMap bg1="lt1" tx1="dk1" bg2="lt2" tx2="dk2" accent1="accent1" accent2="accent2" accent3="accent3" accent4="accent4" accent5="accent5" accent6="accent6" hlink="hlink" folHlink="folHlink"/>
+  <p:notesStyle>
+    <a:lvl1pPr marL="0" algn="l" defTabSz="457200" rtl="0" eaLnBrk="1" latinLnBrk="0" hangingPunct="1">
+      <a:defRPr sz="1200" kern="1200">
+        <a:solidFill>
+          <a:schemeClr val="tx1"/>
+        </a:solidFill>
+        <a:latin typeface="+mn-lt"/>
+        <a:ea typeface="+mn-ea"/>
+        <a:cs typeface="+mn-cs"/>
+      </a:defRPr>
+    </a:lvl1pPr>
+    <a:lvl2pPr marL="457200" algn="l" defTabSz="457200" rtl="0" eaLnBrk="1" latinLnBrk="0" hangingPunct="1">
+      <a:defRPr sz="1200" kern="1200">
+        <a:solidFill>
+          <a:schemeClr val="tx1"/>
+        </a:solidFill>
+        <a:latin typeface="+mn-lt"/>
+        <a:ea typeface="+mn-ea"/>
+        <a:cs typeface="+mn-cs"/>
+      </a:defRPr>
+    </a:lvl2pPr>
+    <a:lvl3pPr marL="914400" algn="l" defTabSz="457200" rtl="0" eaLnBrk="1" latinLnBrk="0" hangingPunct="1">
+      <a:defRPr sz="1200" kern="1200">
+        <a:solidFill>
+          <a:schemeClr val="tx1"/>
+        </a:solidFill>
+        <a:latin typeface="+mn-lt"/>
+        <a:ea typeface="+mn-ea"/>
+        <a:cs typeface="+mn-cs"/>
+      </a:defRPr>
+    </a:lvl3pPr>
+    <a:lvl4pPr marL="1371600" algn="l" defTabSz="457200" rtl="0" eaLnBrk="1" latinLnBrk="0" hangingPunct="1">
+      <a:defRPr sz="1200" kern="1200">
+        <a:solidFill>
+          <a:schemeClr val="tx1"/>
+        </a:solidFill>
+        <a:latin typeface="+mn-lt"/>
+        <a:ea typeface="+mn-ea"/>
+        <a:cs typeface="+mn-cs"/>
+      </a:defRPr>
+    </a:lvl4pPr>
+    <a:lvl5pPr marL="1828800" algn="l" defTabSz="457200" rtl="0" eaLnBrk="1" latinLnBrk="0" hangingPunct="1">
+      <a:defRPr sz="1200" kern="1200">
+        <a:solidFill>
+          <a:schemeClr val="tx1"/>
+        </a:solidFill>
+        <a:latin typeface="+mn-lt"/>
+        <a:ea typeface="+mn-ea"/>
+        <a:cs typeface="+mn-cs"/>
+      </a:defRPr>
+    </a:lvl5pPr>
+    <a:lvl6pPr marL="2286000" algn="l" defTabSz="457200" rtl="0" eaLnBrk="1" latinLnBrk="0" hangingPunct="1">
+      <a:defRPr sz="1200" kern="1200">
+        <a:solidFill>
+          <a:schemeClr val="tx1"/>
+        </a:solidFill>
+        <a:latin typeface="+mn-lt"/>
+        <a:ea typeface="+mn-ea"/>
+        <a:cs typeface="+mn-cs"/>
+      </a:defRPr>
+    </a:lvl6pPr>
+    <a:lvl7pPr marL="2743200" algn="l" defTabSz="457200" rtl="0" eaLnBrk="1" latinLnBrk="0" hangingPunct="1">
+      <a:defRPr sz="1200" kern="1200">
+        <a:solidFill>
+          <a:schemeClr val="tx1"/>
+        </a:solidFill>
+        <a:latin typeface="+mn-lt"/>
+        <a:ea typeface="+mn-ea"/>
+        <a:cs typeface="+mn-cs"/>
+      </a:defRPr>
+    </a:lvl7pPr>
+    <a:lvl8pPr marL="3200400" algn="l" defTabSz="457200" rtl="0" eaLnBrk="1" latinLnBrk="0" hangingPunct="1">
+      <a:defRPr sz="1200" kern="1200">
+        <a:solidFill>
+          <a:schemeClr val="tx1"/>
+        </a:solidFill>
+        <a:latin typeface="+mn-lt"/>
+        <a:ea typeface="+mn-ea"/>
+        <a:cs typeface="+mn-cs"/>
+      </a:defRPr>
+    </a:lvl8pPr>
+    <a:lvl9pPr marL="3657600" algn="l" defTabSz="457200" rtl="0" eaLnBrk="1" latinLnBrk="0" hangingPunct="1">
+      <a:defRPr sz="1200" kern="1200">
+        <a:solidFill>
+          <a:schemeClr val="tx1"/>
+        </a:solidFill>
+        <a:latin typeface="+mn-lt"/>
+        <a:ea typeface="+mn-ea"/>
+        <a:cs typeface="+mn-cs"/>
+      </a:defRPr>
+    </a:lvl9pPr>
+  </p:notesStyle>
+</p:notesMaster>
+</file>
+
+<file path=ppt/notesSlides/notesSlide1.xml><?xml version="1.0" encoding="utf-8"?>
+<p:notes xmlns:a="http://schemas.openxmlformats.org/drawingml/2006/main" xmlns:p="http://schemas.openxmlformats.org/presentationml/2006/main" xmlns:r="http://schemas.openxmlformats.org/officeDocument/2006/relationships">
+  <p:cSld>
+    <p:spTree>
+      <p:nvGrpSpPr>
+        <p:cNvPr id="1" name=""/>
+        <p:cNvGrpSpPr/>
+        <p:nvPr/>
+      </p:nvGrpSpPr>
+      <p:grpSpPr>
+        <a:xfrm>
+          <a:off x="0" y="0"/>
+          <a:ext cx="0" cy="0"/>
+          <a:chOff x="0" y="0"/>
+          <a:chExt cx="0" cy="0"/>
+        </a:xfrm>
+      </p:grpSpPr>
+      <p:sp>
+        <p:nvSpPr>
+          <p:cNvPr id="2" name="Slide Image Placeholder 1"/>
+          <p:cNvSpPr>
+            <a:spLocks noGrp="1"/>
+          </p:cNvSpPr>
+          <p:nvPr>
+            <p:ph type="sldImg" idx="2"/>
+          </p:nvPr>
+        </p:nvSpPr>
+        <p:spPr/>
+      </p:sp>
+      <p:sp>
+        <p:nvSpPr>
+          <p:cNvPr id="3" name="Notes Placeholder 2"/>
+          <p:cNvSpPr>
+            <a:spLocks noGrp="1"/>
+          </p:cNvSpPr>
+          <p:nvPr>
+            <p:ph type="body" idx="3" sz="quarter"/>
+          </p:nvPr>
+        </p:nvSpPr>
+        <p:spPr/>
+        <p:txBody>
+          <a:bodyPr/>
+          <a:lstStyle/>
+          <a:p>
+            <a:r>
+              <a:t>This is Option 3, and it comes down to one question: do we switch the AI on?</a:t>
+            </a:r>
+          </a:p>
+          <a:p/>
+          <a:p>
+            <a:r>
+              <a:t>The version JLR has today runs with AI switched off. That is Option 2. It costs a part from the 3D model on rules alone, and it asks the engineer when it cannot tell.</a:t>
+            </a:r>
+          </a:p>
+          <a:p/>
+          <a:p>
+            <a:r>
+              <a:t>The gap is boards and drawings. Costing a circuit board means listing every component and pricing each one. We are told a medium board takes two to three weeks, and only a specialist can do it. On machined parts, a lot of what matters is on the 2D drawing, and it is typed in by hand.</a:t>
+            </a:r>
+          </a:p>
+          <a:p/>
+          <a:p>
+            <a:r>
+              <a:t>Option 3 lets the tool read a board photo, or a drawing alongside the 3D model. That code is already in the product. It is switched off, and it can be switched on by a setting.</a:t>
+            </a:r>
+          </a:p>
+          <a:p/>
+          <a:p>
+            <a:r>
+              <a:t>The real question is safety, so here is what is already built. There is one off-switch. Every AI call goes through one place, and that place can point at a private endpoint. Every AI route has a per-user limit. And the AI never sets a price. It reads. The engine does the arithmetic.</a:t>
+            </a:r>
+          </a:p>
+          <a:p/>
+          <a:p>
+            <a:r>
+              <a:t>The cost and the return are blank on purpose. We have not measured them. That is what the Proof of Value is for.</a:t>
+            </a:r>
+          </a:p>
+        </p:txBody>
+      </p:sp>
+      <p:sp>
+        <p:nvSpPr>
+          <p:cNvPr id="4" name="Slide Number Placeholder 3"/>
+          <p:cNvSpPr>
+            <a:spLocks noGrp="1"/>
+          </p:cNvSpPr>
+          <p:nvPr>
+            <p:ph type="sldNum" idx="5" sz="quarter"/>
+          </p:nvPr>
+        </p:nvSpPr>
+        <p:spPr/>
+      </p:sp>
+    </p:spTree>
+  </p:cSld>
+  <p:clrMapOvr>
+    <a:masterClrMapping/>
+  </p:clrMapOvr>
+</p:notes>
+</file>
+
+<file path=ppt/notesSlides/notesSlide2.xml><?xml version="1.0" encoding="utf-8"?>
+<p:notes xmlns:a="http://schemas.openxmlformats.org/drawingml/2006/main" xmlns:p="http://schemas.openxmlformats.org/presentationml/2006/main" xmlns:r="http://schemas.openxmlformats.org/officeDocument/2006/relationships">
+  <p:cSld>
+    <p:spTree>
+      <p:nvGrpSpPr>
+        <p:cNvPr id="1" name=""/>
+        <p:cNvGrpSpPr/>
+        <p:nvPr/>
+      </p:nvGrpSpPr>
+      <p:grpSpPr>
+        <a:xfrm>
+          <a:off x="0" y="0"/>
+          <a:ext cx="0" cy="0"/>
+          <a:chOff x="0" y="0"/>
+          <a:chExt cx="0" cy="0"/>
+        </a:xfrm>
+      </p:grpSpPr>
+      <p:sp>
+        <p:nvSpPr>
+          <p:cNvPr id="2" name="Slide Image Placeholder 1"/>
+          <p:cNvSpPr>
+            <a:spLocks noGrp="1"/>
+          </p:cNvSpPr>
+          <p:nvPr>
+            <p:ph type="sldImg" idx="2"/>
+          </p:nvPr>
+        </p:nvSpPr>
+        <p:spPr/>
+      </p:sp>
+      <p:sp>
+        <p:nvSpPr>
+          <p:cNvPr id="3" name="Notes Placeholder 2"/>
+          <p:cNvSpPr>
+            <a:spLocks noGrp="1"/>
+          </p:cNvSpPr>
+          <p:nvPr>
+            <p:ph type="body" idx="3" sz="quarter"/>
+          </p:nvPr>
+        </p:nvSpPr>
+        <p:spPr/>
+        <p:txBody>
+          <a:bodyPr/>
+          <a:lstStyle/>
+          <a:p>
+            <a:r>
+              <a:t>This page is the detail. On the left is how a board is costed today, and what we propose instead.</a:t>
+            </a:r>
+          </a:p>
+          <a:p/>
+          <a:p>
+            <a:r>
+              <a:t>Today someone identifies every component, finds a price for each line, then estimates the bare board and the assembly. It is slow, and it needs a specialist.</a:t>
+            </a:r>
+          </a:p>
+          <a:p/>
+          <a:p>
+            <a:r>
+              <a:t>With AI on, you upload a photo of the board and say how many and where it is built. The tool lists the parts it can see, prices each line from a catalogue, and works out the board and the assembly. Prices it reads are checked against that catalogue before they are used. For a machined part, the drawing is read next to the 3D model, for things the model cannot carry, like tolerances and finish. If the AI disagrees with the measured geometry, the geometry wins.</a:t>
+            </a:r>
+          </a:p>
+          <a:p/>
+          <a:p>
+            <a:r>
+              <a:t>I am not claiming it is accurate yet. No estimate from this tool has been compared with a price JLR actually paid. So the Proof of Value compares its output with cost estimates we already have.</a:t>
+            </a:r>
+          </a:p>
+          <a:p/>
+          <a:p>
+            <a:r>
+              <a:t>On the right are the benefits we expect. The main one is simple. A cost engineer can cost a board, and the specialist checks the answer instead of building it. The engineer still signs off every figure.</a:t>
+            </a:r>
+          </a:p>
+        </p:txBody>
+      </p:sp>
+      <p:sp>
+        <p:nvSpPr>
+          <p:cNvPr id="4" name="Slide Number Placeholder 3"/>
+          <p:cNvSpPr>
+            <a:spLocks noGrp="1"/>
+          </p:cNvSpPr>
+          <p:nvPr>
+            <p:ph type="sldNum" idx="5" sz="quarter"/>
+          </p:nvPr>
+        </p:nvSpPr>
+        <p:spPr/>
+      </p:sp>
+    </p:spTree>
+  </p:cSld>
+  <p:clrMapOvr>
+    <a:masterClrMapping/>
+  </p:clrMapOvr>
+</p:notes>
 </file>
 
 <file path=ppt/slideLayouts/slideLayout1.xml><?xml version="1.0" encoding="utf-8"?>
@@ -3152,7 +3699,7 @@
                 </a:solidFill>
                 <a:latin typeface="Calibri"/>
               </a:rPr>
-              <a:t>Drawings and PCB Photos – Automated Part Costing</a:t>
+              <a:t>Option 3 – Switch AI On for Drawings and PCB Photos</a:t>
             </a:r>
           </a:p>
         </p:txBody>
@@ -3539,7 +4086,7 @@
                 </a:solidFill>
                 <a:latin typeface="Calibri"/>
               </a:rPr>
-              <a:t>Cost: £???</a:t>
+              <a:t>Cost: £ to be confirmed</a:t>
             </a:r>
           </a:p>
           <a:p>
@@ -3558,7 +4105,7 @@
                 </a:solidFill>
                 <a:latin typeface="Calibri"/>
               </a:rPr>
-              <a:t>Return: £???</a:t>
+              <a:t>Return: £ to be confirmed</a:t>
             </a:r>
           </a:p>
           <a:p>
@@ -4413,7 +4960,7 @@
                 <a:spcPct val="100000"/>
               </a:lnSpc>
               <a:spcBef>
-                <a:spcPts val="1300"/>
+                <a:spcPts val="800"/>
               </a:spcBef>
             </a:pPr>
             <a:r>
@@ -4423,7 +4970,26 @@
                 </a:solidFill>
                 <a:latin typeface="Calibri"/>
               </a:rPr>
-              <a:t>Model used: Claude (Anthropic)</a:t>
+              <a:t>Safety controls already built?</a:t>
+            </a:r>
+          </a:p>
+          <a:p>
+            <a:pPr algn="l">
+              <a:lnSpc>
+                <a:spcPct val="100000"/>
+              </a:lnSpc>
+              <a:spcBef>
+                <a:spcPts val="100"/>
+              </a:spcBef>
+            </a:pPr>
+            <a:r>
+              <a:rPr sz="1100" b="1">
+                <a:solidFill>
+                  <a:srgbClr val="16325C"/>
+                </a:solidFill>
+                <a:latin typeface="Calibri"/>
+              </a:rPr>
+              <a:t>(YES)</a:t>
             </a:r>
           </a:p>
           <a:p>
@@ -4442,7 +5008,7 @@
                 </a:solidFill>
                 <a:latin typeface="Calibri"/>
               </a:rPr>
-              <a:t>Sonnet and Haiku to read, Opus where a board needs a closer look.</a:t>
+              <a:t>One off-switch, a private endpoint, per-user limits. AI never sets a price.</a:t>
             </a:r>
           </a:p>
           <a:p>
@@ -4451,7 +5017,7 @@
                 <a:spcPct val="100000"/>
               </a:lnSpc>
               <a:spcBef>
-                <a:spcPts val="1300"/>
+                <a:spcPts val="800"/>
               </a:spcBef>
             </a:pPr>
             <a:r>
@@ -4499,7 +5065,7 @@
                 </a:solidFill>
                 <a:latin typeface="Calibri"/>
               </a:rPr>
-              <a:t>It needs an approved route to the model. Option 2 runs with that route switched off. This one cannot.</a:t>
+              <a:t>An approved route to the model. Option 2 runs with AI off; this cannot.</a:t>
             </a:r>
           </a:p>
         </p:txBody>
@@ -4551,7 +5117,7 @@
                 </a:solidFill>
                 <a:latin typeface="Calibri"/>
               </a:rPr>
-              <a:t>Drawings and PCB Photos – The Proposal in Detail</a:t>
+              <a:t>Option 3 – The Proposal in Detail</a:t>
             </a:r>
           </a:p>
         </p:txBody>
@@ -4813,7 +5379,7 @@
                 </a:solidFill>
                 <a:latin typeface="Calibri"/>
               </a:rPr>
-              <a:t>Extend the Proof of Value to cover 2D drawings and photographs of boards.</a:t>
+              <a:t>Switch AI on by a setting, not a rebuild, and extend the Proof of Value to 2D drawings and board photos.</a:t>
             </a:r>
           </a:p>
           <a:p>
@@ -5479,4 +6045,324 @@
   </a:objectDefaults>
   <a:extraClrSchemeLst/>
 </a:theme>
+</file>
+
+<file path=ppt/theme/theme2.xml><?xml version="1.0" encoding="utf-8"?>
+<a:theme xmlns:a="http://schemas.openxmlformats.org/drawingml/2006/main" name="Office Theme">
+  <a:themeElements>
+    <a:clrScheme name="Office">
+      <a:dk1>
+        <a:sysClr val="windowText" lastClr="000000"/>
+      </a:dk1>
+      <a:lt1>
+        <a:sysClr val="window" lastClr="FFFFFF"/>
+      </a:lt1>
+      <a:dk2>
+        <a:srgbClr val="1F497D"/>
+      </a:dk2>
+      <a:lt2>
+        <a:srgbClr val="EEECE1"/>
+      </a:lt2>
+      <a:accent1>
+        <a:srgbClr val="4F81BD"/>
+      </a:accent1>
+      <a:accent2>
+        <a:srgbClr val="C0504D"/>
+      </a:accent2>
+      <a:accent3>
+        <a:srgbClr val="9BBB59"/>
+      </a:accent3>
+      <a:accent4>
+        <a:srgbClr val="8064A2"/>
+      </a:accent4>
+      <a:accent5>
+        <a:srgbClr val="4BACC6"/>
+      </a:accent5>
+      <a:accent6>
+        <a:srgbClr val="F79646"/>
+      </a:accent6>
+      <a:hlink>
+        <a:srgbClr val="0000FF"/>
+      </a:hlink>
+      <a:folHlink>
+        <a:srgbClr val="800080"/>
+      </a:folHlink>
+    </a:clrScheme>
+    <a:fontScheme name="Office">
+      <a:majorFont>
+        <a:latin typeface="Calibri"/>
+        <a:ea typeface=""/>
+        <a:cs typeface=""/>
+        <a:font script="Jpan" typeface="ＭＳ Ｐゴシック"/>
+        <a:font script="Hang" typeface="맑은 고딕"/>
+        <a:font script="Hans" typeface="宋体"/>
+        <a:font script="Hant" typeface="新細明體"/>
+        <a:font script="Arab" typeface="Times New Roman"/>
+        <a:font script="Hebr" typeface="Times New Roman"/>
+        <a:font script="Thai" typeface="Angsana New"/>
+        <a:font script="Ethi" typeface="Nyala"/>
+        <a:font script="Beng" typeface="Vrinda"/>
+        <a:font script="Gujr" typeface="Shruti"/>
+        <a:font script="Khmr" typeface="MoolBoran"/>
+        <a:font script="Knda" typeface="Tunga"/>
+        <a:font script="Guru" typeface="Raavi"/>
+        <a:font script="Cans" typeface="Euphemia"/>
+        <a:font script="Cher" typeface="Plantagenet Cherokee"/>
+        <a:font script="Yiii" typeface="Microsoft Yi Baiti"/>
+        <a:font script="Tibt" typeface="Microsoft Himalaya"/>
+        <a:font script="Thaa" typeface="MV Boli"/>
+        <a:font script="Deva" typeface="Mangal"/>
+        <a:font script="Telu" typeface="Gautami"/>
+        <a:font script="Taml" typeface="Latha"/>
+        <a:font script="Syrc" typeface="Estrangelo Edessa"/>
+        <a:font script="Orya" typeface="Kalinga"/>
+        <a:font script="Mlym" typeface="Kartika"/>
+        <a:font script="Laoo" typeface="DokChampa"/>
+        <a:font script="Sinh" typeface="Iskoola Pota"/>
+        <a:font script="Mong" typeface="Mongolian Baiti"/>
+        <a:font script="Viet" typeface="Times New Roman"/>
+        <a:font script="Uigh" typeface="Microsoft Uighur"/>
+        <a:font script="Geor" typeface="Sylfaen"/>
+      </a:majorFont>
+      <a:minorFont>
+        <a:latin typeface="Calibri"/>
+        <a:ea typeface=""/>
+        <a:cs typeface=""/>
+        <a:font script="Jpan" typeface="ＭＳ Ｐゴシック"/>
+        <a:font script="Hang" typeface="맑은 고딕"/>
+        <a:font script="Hans" typeface="宋体"/>
+        <a:font script="Hant" typeface="新細明體"/>
+        <a:font script="Arab" typeface="Arial"/>
+        <a:font script="Hebr" typeface="Arial"/>
+        <a:font script="Thai" typeface="Cordia New"/>
+        <a:font script="Ethi" typeface="Nyala"/>
+        <a:font script="Beng" typeface="Vrinda"/>
+        <a:font script="Gujr" typeface="Shruti"/>
+        <a:font script="Khmr" typeface="DaunPenh"/>
+        <a:font script="Knda" typeface="Tunga"/>
+        <a:font script="Guru" typeface="Raavi"/>
+        <a:font script="Cans" typeface="Euphemia"/>
+        <a:font script="Cher" typeface="Plantagenet Cherokee"/>
+        <a:font script="Yiii" typeface="Microsoft Yi Baiti"/>
+        <a:font script="Tibt" typeface="Microsoft Himalaya"/>
+        <a:font script="Thaa" typeface="MV Boli"/>
+        <a:font script="Deva" typeface="Mangal"/>
+        <a:font script="Telu" typeface="Gautami"/>
+        <a:font script="Taml" typeface="Latha"/>
+        <a:font script="Syrc" typeface="Estrangelo Edessa"/>
+        <a:font script="Orya" typeface="Kalinga"/>
+        <a:font script="Mlym" typeface="Kartika"/>
+        <a:font script="Laoo" typeface="DokChampa"/>
+        <a:font script="Sinh" typeface="Iskoola Pota"/>
+        <a:font script="Mong" typeface="Mongolian Baiti"/>
+        <a:font script="Viet" typeface="Arial"/>
+        <a:font script="Uigh" typeface="Microsoft Uighur"/>
+        <a:font script="Geor" typeface="Sylfaen"/>
+      </a:minorFont>
+    </a:fontScheme>
+    <a:fmtScheme name="Office">
+      <a:fillStyleLst>
+        <a:solidFill>
+          <a:schemeClr val="phClr"/>
+        </a:solidFill>
+        <a:gradFill rotWithShape="1">
+          <a:gsLst>
+            <a:gs pos="0">
+              <a:schemeClr val="phClr">
+                <a:tint val="50000"/>
+                <a:satMod val="300000"/>
+              </a:schemeClr>
+            </a:gs>
+            <a:gs pos="35000">
+              <a:schemeClr val="phClr">
+                <a:tint val="37000"/>
+                <a:satMod val="300000"/>
+              </a:schemeClr>
+            </a:gs>
+            <a:gs pos="100000">
+              <a:schemeClr val="phClr">
+                <a:tint val="15000"/>
+                <a:satMod val="350000"/>
+              </a:schemeClr>
+            </a:gs>
+          </a:gsLst>
+          <a:lin ang="16200000" scaled="1"/>
+        </a:gradFill>
+        <a:gradFill rotWithShape="1">
+          <a:gsLst>
+            <a:gs pos="0">
+              <a:schemeClr val="phClr">
+                <a:tint val="100000"/>
+                <a:shade val="100000"/>
+                <a:satMod val="130000"/>
+              </a:schemeClr>
+            </a:gs>
+            <a:gs pos="100000">
+              <a:schemeClr val="phClr">
+                <a:tint val="50000"/>
+                <a:shade val="100000"/>
+                <a:satMod val="350000"/>
+              </a:schemeClr>
+            </a:gs>
+          </a:gsLst>
+          <a:lin ang="16200000" scaled="0"/>
+        </a:gradFill>
+      </a:fillStyleLst>
+      <a:lnStyleLst>
+        <a:ln w="9525" cap="flat" cmpd="sng" algn="ctr">
+          <a:solidFill>
+            <a:schemeClr val="phClr">
+              <a:shade val="95000"/>
+              <a:satMod val="105000"/>
+            </a:schemeClr>
+          </a:solidFill>
+          <a:prstDash val="solid"/>
+        </a:ln>
+        <a:ln w="25400" cap="flat" cmpd="sng" algn="ctr">
+          <a:solidFill>
+            <a:schemeClr val="phClr"/>
+          </a:solidFill>
+          <a:prstDash val="solid"/>
+        </a:ln>
+        <a:ln w="38100" cap="flat" cmpd="sng" algn="ctr">
+          <a:solidFill>
+            <a:schemeClr val="phClr"/>
+          </a:solidFill>
+          <a:prstDash val="solid"/>
+        </a:ln>
+      </a:lnStyleLst>
+      <a:effectStyleLst>
+        <a:effectStyle>
+          <a:effectLst>
+            <a:outerShdw blurRad="40000" dist="20000" dir="5400000" rotWithShape="0">
+              <a:srgbClr val="000000">
+                <a:alpha val="38000"/>
+              </a:srgbClr>
+            </a:outerShdw>
+          </a:effectLst>
+        </a:effectStyle>
+        <a:effectStyle>
+          <a:effectLst>
+            <a:outerShdw blurRad="40000" dist="23000" dir="5400000" rotWithShape="0">
+              <a:srgbClr val="000000">
+                <a:alpha val="35000"/>
+              </a:srgbClr>
+            </a:outerShdw>
+          </a:effectLst>
+        </a:effectStyle>
+        <a:effectStyle>
+          <a:effectLst>
+            <a:outerShdw blurRad="40000" dist="23000" dir="5400000" rotWithShape="0">
+              <a:srgbClr val="000000">
+                <a:alpha val="35000"/>
+              </a:srgbClr>
+            </a:outerShdw>
+          </a:effectLst>
+          <a:scene3d>
+            <a:camera prst="orthographicFront">
+              <a:rot lat="0" lon="0" rev="0"/>
+            </a:camera>
+            <a:lightRig rig="threePt" dir="t">
+              <a:rot lat="0" lon="0" rev="1200000"/>
+            </a:lightRig>
+          </a:scene3d>
+          <a:sp3d>
+            <a:bevelT w="63500" h="25400"/>
+          </a:sp3d>
+        </a:effectStyle>
+      </a:effectStyleLst>
+      <a:bgFillStyleLst>
+        <a:solidFill>
+          <a:schemeClr val="phClr"/>
+        </a:solidFill>
+        <a:gradFill rotWithShape="1">
+          <a:gsLst>
+            <a:gs pos="0">
+              <a:schemeClr val="phClr">
+                <a:tint val="40000"/>
+                <a:satMod val="350000"/>
+              </a:schemeClr>
+            </a:gs>
+            <a:gs pos="40000">
+              <a:schemeClr val="phClr">
+                <a:tint val="45000"/>
+                <a:shade val="99000"/>
+                <a:satMod val="350000"/>
+              </a:schemeClr>
+            </a:gs>
+            <a:gs pos="100000">
+              <a:schemeClr val="phClr">
+                <a:shade val="20000"/>
+                <a:satMod val="255000"/>
+              </a:schemeClr>
+            </a:gs>
+          </a:gsLst>
+          <a:path path="circle">
+            <a:fillToRect l="50000" t="-80000" r="50000" b="180000"/>
+          </a:path>
+        </a:gradFill>
+        <a:gradFill rotWithShape="1">
+          <a:gsLst>
+            <a:gs pos="0">
+              <a:schemeClr val="phClr">
+                <a:tint val="80000"/>
+                <a:satMod val="300000"/>
+              </a:schemeClr>
+            </a:gs>
+            <a:gs pos="100000">
+              <a:schemeClr val="phClr">
+                <a:shade val="30000"/>
+                <a:satMod val="200000"/>
+              </a:schemeClr>
+            </a:gs>
+          </a:gsLst>
+          <a:path path="circle">
+            <a:fillToRect l="50000" t="50000" r="50000" b="50000"/>
+          </a:path>
+        </a:gradFill>
+      </a:bgFillStyleLst>
+    </a:fmtScheme>
+  </a:themeElements>
+  <a:objectDefaults>
+    <a:spDef>
+      <a:spPr/>
+      <a:bodyPr/>
+      <a:lstStyle/>
+      <a:style>
+        <a:lnRef idx="1">
+          <a:schemeClr val="accent1"/>
+        </a:lnRef>
+        <a:fillRef idx="3">
+          <a:schemeClr val="accent1"/>
+        </a:fillRef>
+        <a:effectRef idx="2">
+          <a:schemeClr val="accent1"/>
+        </a:effectRef>
+        <a:fontRef idx="minor">
+          <a:schemeClr val="lt1"/>
+        </a:fontRef>
+      </a:style>
+    </a:spDef>
+    <a:lnDef>
+      <a:spPr/>
+      <a:bodyPr/>
+      <a:lstStyle/>
+      <a:style>
+        <a:lnRef idx="2">
+          <a:schemeClr val="accent1"/>
+        </a:lnRef>
+        <a:fillRef idx="0">
+          <a:schemeClr val="accent1"/>
+        </a:fillRef>
+        <a:effectRef idx="1">
+          <a:schemeClr val="accent1"/>
+        </a:effectRef>
+        <a:fontRef idx="minor">
+          <a:schemeClr val="tx1"/>
+        </a:fontRef>
+      </a:style>
+    </a:lnDef>
+  </a:objectDefaults>
+  <a:extraClrSchemeLst/>
+</a:theme>
 </file>
--- a/CostVision-Option-3-Business-Case.pptx
+++ b/CostVision-Option-3-Business-Case.pptx
@@ -512,7 +512,7 @@
           <a:p/>
           <a:p>
             <a:r>
-              <a:t>The version JLR has today runs with AI switched off. That is Option 2. It costs a part from the 3D model on rules alone, and it asks the engineer when it cannot tell.</a:t>
+              <a:t>The version JLR has today runs without an API key. That is Option 2. It costs a part from the 3D model on rules alone, and it asks the engineer when it cannot tell.</a:t>
             </a:r>
           </a:p>
           <a:p/>
@@ -524,7 +524,7 @@
           <a:p/>
           <a:p>
             <a:r>
-              <a:t>Option 3 lets the tool read a board photo, or a drawing alongside the 3D model. That code is already in the product. It is switched off, and it can be switched on by a setting.</a:t>
+              <a:t>Option 3 lets the tool read a board photo, or a drawing alongside the 3D model. That code is already in the product. It waits for a key, and adding one turns it on.</a:t>
             </a:r>
           </a:p>
           <a:p/>
@@ -618,7 +618,7 @@
           <a:p/>
           <a:p>
             <a:r>
-              <a:t>With AI on, you upload a photo of the board and say how many and where it is built. The tool lists the parts it can see, prices each line from a catalogue, and works out the board and the assembly. Prices it reads are checked against that catalogue before they are used. For a machined part, the drawing is read next to the 3D model, for things the model cannot carry, like tolerances and finish. If the AI disagrees with the measured geometry, the geometry wins.</a:t>
+              <a:t>With AI on, you upload a photo of the board and say how many and where it is built. The tool lists the parts it can see; the tool prices each line from its catalogue and class tables, and works out the board and the assembly. The model is not asked for a cost. For a machined part, the drawing is read next to the 3D model, for things the model cannot carry, like tolerances and finish. If the AI disagrees with the measured geometry, the geometry wins.</a:t>
             </a:r>
           </a:p>
           <a:p/>
@@ -5065,7 +5065,7 @@
                 </a:solidFill>
                 <a:latin typeface="Calibri"/>
               </a:rPr>
-              <a:t>An approved route to the model. Option 2 runs with AI off; this cannot.</a:t>
+              <a:t>An approved route to the model. Option 2 runs without a key; this cannot.</a:t>
             </a:r>
           </a:p>
         </p:txBody>
@@ -5421,7 +5421,7 @@
                 </a:solidFill>
                 <a:latin typeface="Calibri"/>
               </a:rPr>
-              <a:t>The tool lists the components it can see, prices each line from the catalogue, works out the bare board and the assembly, and returns the full cost breakdown.</a:t>
+              <a:t>The model lists the components it can see; the tool prices each line from its catalogue and class tables, works out the bare board and the assembly, and returns the full cost breakdown.</a:t>
             </a:r>
           </a:p>
           <a:p>
@@ -5463,7 +5463,7 @@
                 </a:solidFill>
                 <a:latin typeface="Calibri"/>
               </a:rPr>
-              <a:t>Every figure it reads is checked against the price catalogue or the measured geometry before it is used.</a:t>
+              <a:t>The model is not asked for a cost; every price comes from the catalogue, a stated range or the class table, and each line shows its source before it is used.</a:t>
             </a:r>
           </a:p>
           <a:p>
